--- a/临时文件/Di_Poster_ver4.pptx
+++ b/临时文件/Di_Poster_ver4.pptx
@@ -3888,10 +3888,6 @@
           <a:lstStyle/>
           <a:p>
             <a:pPr algn="ctr"/>
-            <a:r>
-              <a:rPr kumimoji="1" lang="en-US" altLang="ja-JP" sz="1400" dirty="0"/>
-              <a:t>3</a:t>
-            </a:r>
             <a:endParaRPr kumimoji="1" lang="ja-JP" altLang="en-US" sz="1400" dirty="0"/>
           </a:p>
         </p:txBody>
@@ -4109,36 +4105,6 @@
               <a:t> and object apparent size, providing a potential approach for real-time prosthetic hand control.</a:t>
             </a:r>
             <a:endParaRPr lang="en-US" altLang="zh-CN" sz="5200"/>
-          </a:p>
-        </p:txBody>
-      </p:sp>
-      <p:sp>
-        <p:nvSpPr>
-          <p:cNvPr id="20" name="テキスト ボックス 19"/>
-          <p:cNvSpPr txBox="1"/>
-          <p:nvPr/>
-        </p:nvSpPr>
-        <p:spPr>
-          <a:xfrm>
-            <a:off x="5943297" y="1074976"/>
-            <a:ext cx="819455" cy="400110"/>
-          </a:xfrm>
-          <a:prstGeom prst="rect">
-            <a:avLst/>
-          </a:prstGeom>
-          <a:noFill/>
-        </p:spPr>
-        <p:txBody>
-          <a:bodyPr wrap="none" rtlCol="0">
-            <a:spAutoFit/>
-          </a:bodyPr>
-          <a:lstStyle/>
-          <a:p>
-            <a:r>
-              <a:rPr kumimoji="1" lang="ja-JP" altLang="en-US" sz="2000"/>
-              <a:t>タスク</a:t>
-            </a:r>
-            <a:endParaRPr kumimoji="1" lang="ja-JP" altLang="en-US" sz="2000"/>
           </a:p>
         </p:txBody>
       </p:sp>
